--- a/library/seminars/sem-06/rendered/sem-06-n2.pptx
+++ b/library/seminars/sem-06/rendered/sem-06-n2.pptx
@@ -662,7 +662,7 @@
               <a:t>Если прозвучит «сжимать чаще».</a:t>
             </a:r>
             <a:r>
-              <a:t> Держу до разбора: там видно, что описания инструментов сжатием не уходят — они часть каждого нового контекста, а не часть истории разговора.</a:t>
+              <a:t> Держу до разбора: там видно, что описания инструментов сжатием не уходят — они приходят в каждый новый контекст заново, отдельно от истории разговора.</a:t>
             </a:r>
           </a:p>
           <a:p/>
